--- a/dist/초2/수학/수와계산/초2_수학_수와계산_07_2단과5단_학생용.pptx
+++ b/dist/초2/수학/수와계산/초2_수학_수와계산_07_2단과5단_학생용.pptx
@@ -120,13 +120,13 @@
   <p:extLst>
     <p:ext uri="{521415D9-36F7-43E2-AB2F-B90AF26B5E84}">
       <p14:sectionLst xmlns:p14="http://schemas.microsoft.com/office/powerpoint/2010/main">
-        <p14:section name="도입" id="{f0f712b4-c763-838a-1d4b-9d79278abd15}">
+        <p14:section name="도입" id="{5124a853-c231-2635-6530-4be34da3a720}">
           <p14:sldIdLst>
             <p14:sldId id="256"/>
             <p14:sldId id="257"/>
           </p14:sldIdLst>
         </p14:section>
-        <p14:section name="개념" id="{e011c46b-8217-e805-4361-25ee229afc20}">
+        <p14:section name="개념" id="{266c122b-8aaf-1703-e7d7-9a9859f34cdb}">
           <p14:sldIdLst>
             <p14:sldId id="258"/>
             <p14:sldId id="259"/>
@@ -136,24 +136,24 @@
             <p14:sldId id="263"/>
           </p14:sldIdLst>
         </p14:section>
-        <p14:section name="연습" id="{db4f7fe2-558f-d1a1-ab82-8e1512a7773c}">
+        <p14:section name="연습" id="{e2ad7cdf-03ae-8dc2-deb3-2b76f92628f7}">
           <p14:sldIdLst>
             <p14:sldId id="264"/>
             <p14:sldId id="265"/>
           </p14:sldIdLst>
         </p14:section>
-        <p14:section name="확인" id="{436170b1-c6ac-a6ef-6a9d-c28c7d7467ac}">
+        <p14:section name="확인" id="{3af7a157-a1e0-3dd1-06da-34390907532f}">
           <p14:sldIdLst>
             <p14:sldId id="266"/>
             <p14:sldId id="267"/>
           </p14:sldIdLst>
         </p14:section>
-        <p14:section name="정리" id="{26f7c310-d558-8be5-f1ab-d314fb9f529d}">
+        <p14:section name="정리" id="{63b12623-3b21-3759-6ad8-8720b0739ef2}">
           <p14:sldIdLst>
             <p14:sldId id="268"/>
           </p14:sldIdLst>
         </p14:section>
-        <p14:section name="보충" id="{0277f05c-56c6-d322-ba14-42a8150381e4}">
+        <p14:section name="보충" id="{1cf502ae-7a23-6966-2ad1-c2df32027d91}">
           <p14:sldIdLst>
             <p14:sldId id="269"/>
           </p14:sldIdLst>
@@ -8942,7 +8942,7 @@
                 <a:ea typeface="맑은 고딕" pitchFamily="34" charset="-122"/>
                 <a:cs typeface="맑은 고딕" pitchFamily="34" charset="-120"/>
               </a:rPr>
-              <a:t>2 × 5 = 10보다 2 커요.</a:t>
+              <a:t>12는 2와 6의 ‘곱’이에요.</a:t>
             </a:r>
             <a:endParaRPr lang="ko-KR" sz="3200" dirty="0"/>
           </a:p>

--- a/dist/초2/수학/수와계산/초2_수학_수와계산_07_2단과5단_학생용.pptx
+++ b/dist/초2/수학/수와계산/초2_수학_수와계산_07_2단과5단_학생용.pptx
@@ -120,13 +120,13 @@
   <p:extLst>
     <p:ext uri="{521415D9-36F7-43E2-AB2F-B90AF26B5E84}">
       <p14:sectionLst xmlns:p14="http://schemas.microsoft.com/office/powerpoint/2010/main">
-        <p14:section name="도입" id="{5124a853-c231-2635-6530-4be34da3a720}">
+        <p14:section name="도입" id="{708f74e8-e51d-85fc-f4f2-c42fa2818ad1}">
           <p14:sldIdLst>
             <p14:sldId id="256"/>
             <p14:sldId id="257"/>
           </p14:sldIdLst>
         </p14:section>
-        <p14:section name="개념" id="{266c122b-8aaf-1703-e7d7-9a9859f34cdb}">
+        <p14:section name="개념" id="{1a008376-4856-7d28-55a9-2968a297970d}">
           <p14:sldIdLst>
             <p14:sldId id="258"/>
             <p14:sldId id="259"/>
@@ -136,24 +136,24 @@
             <p14:sldId id="263"/>
           </p14:sldIdLst>
         </p14:section>
-        <p14:section name="연습" id="{e2ad7cdf-03ae-8dc2-deb3-2b76f92628f7}">
+        <p14:section name="연습" id="{7e516e0f-425c-539b-7225-9b26119c360a}">
           <p14:sldIdLst>
             <p14:sldId id="264"/>
             <p14:sldId id="265"/>
           </p14:sldIdLst>
         </p14:section>
-        <p14:section name="확인" id="{3af7a157-a1e0-3dd1-06da-34390907532f}">
+        <p14:section name="확인" id="{129d939f-c356-e978-a90b-6e8f936d26c2}">
           <p14:sldIdLst>
             <p14:sldId id="266"/>
             <p14:sldId id="267"/>
           </p14:sldIdLst>
         </p14:section>
-        <p14:section name="정리" id="{63b12623-3b21-3759-6ad8-8720b0739ef2}">
+        <p14:section name="정리" id="{cd52a398-b06d-45d5-c2b4-e9a9a53f97ec}">
           <p14:sldIdLst>
             <p14:sldId id="268"/>
           </p14:sldIdLst>
         </p14:section>
-        <p14:section name="보충" id="{1cf502ae-7a23-6966-2ad1-c2df32027d91}">
+        <p14:section name="보충" id="{8d050fa2-82ba-6102-15c7-290ca111b0d5}">
           <p14:sldIdLst>
             <p14:sldId id="269"/>
           </p14:sldIdLst>
@@ -6822,7 +6822,7 @@
         </p:nvSpPr>
         <p:spPr>
           <a:xfrm>
-            <a:off x="2674925" y="2092757"/>
+            <a:off x="3315005" y="2092757"/>
             <a:ext cx="264566" cy="264566"/>
           </a:xfrm>
           <a:prstGeom prst="ellipse">
@@ -6847,7 +6847,7 @@
         </p:nvSpPr>
         <p:spPr>
           <a:xfrm>
-            <a:off x="3101645" y="2092757"/>
+            <a:off x="3741725" y="2092757"/>
             <a:ext cx="264566" cy="264566"/>
           </a:xfrm>
           <a:prstGeom prst="ellipse">
@@ -6872,7 +6872,7 @@
         </p:nvSpPr>
         <p:spPr>
           <a:xfrm>
-            <a:off x="3528365" y="2092757"/>
+            <a:off x="4168445" y="2092757"/>
             <a:ext cx="264566" cy="264566"/>
           </a:xfrm>
           <a:prstGeom prst="ellipse">
@@ -6897,7 +6897,7 @@
         </p:nvSpPr>
         <p:spPr>
           <a:xfrm>
-            <a:off x="3955085" y="2092757"/>
+            <a:off x="4595165" y="2092757"/>
             <a:ext cx="264566" cy="264566"/>
           </a:xfrm>
           <a:prstGeom prst="ellipse">
@@ -6922,7 +6922,7 @@
         </p:nvSpPr>
         <p:spPr>
           <a:xfrm>
-            <a:off x="2674925" y="2519477"/>
+            <a:off x="3315005" y="2519477"/>
             <a:ext cx="264566" cy="264566"/>
           </a:xfrm>
           <a:prstGeom prst="ellipse">
@@ -6947,7 +6947,7 @@
         </p:nvSpPr>
         <p:spPr>
           <a:xfrm>
-            <a:off x="3101645" y="2519477"/>
+            <a:off x="3741725" y="2519477"/>
             <a:ext cx="264566" cy="264566"/>
           </a:xfrm>
           <a:prstGeom prst="ellipse">
@@ -6972,7 +6972,7 @@
         </p:nvSpPr>
         <p:spPr>
           <a:xfrm>
-            <a:off x="3528365" y="2519477"/>
+            <a:off x="4168445" y="2519477"/>
             <a:ext cx="264566" cy="264566"/>
           </a:xfrm>
           <a:prstGeom prst="ellipse">
@@ -6997,7 +6997,7 @@
         </p:nvSpPr>
         <p:spPr>
           <a:xfrm>
-            <a:off x="3955085" y="2519477"/>
+            <a:off x="4595165" y="2519477"/>
             <a:ext cx="264566" cy="264566"/>
           </a:xfrm>
           <a:prstGeom prst="ellipse">
@@ -7022,7 +7022,7 @@
         </p:nvSpPr>
         <p:spPr>
           <a:xfrm>
-            <a:off x="2674925" y="2946197"/>
+            <a:off x="3315005" y="2946197"/>
             <a:ext cx="264566" cy="264566"/>
           </a:xfrm>
           <a:prstGeom prst="ellipse">
@@ -7047,7 +7047,7 @@
         </p:nvSpPr>
         <p:spPr>
           <a:xfrm>
-            <a:off x="3101645" y="2946197"/>
+            <a:off x="3741725" y="2946197"/>
             <a:ext cx="264566" cy="264566"/>
           </a:xfrm>
           <a:prstGeom prst="ellipse">
@@ -7072,7 +7072,7 @@
         </p:nvSpPr>
         <p:spPr>
           <a:xfrm>
-            <a:off x="3528365" y="2946197"/>
+            <a:off x="4168445" y="2946197"/>
             <a:ext cx="264566" cy="264566"/>
           </a:xfrm>
           <a:prstGeom prst="ellipse">
@@ -7097,7 +7097,7 @@
         </p:nvSpPr>
         <p:spPr>
           <a:xfrm>
-            <a:off x="3955085" y="2946197"/>
+            <a:off x="4595165" y="2946197"/>
             <a:ext cx="264566" cy="264566"/>
           </a:xfrm>
           <a:prstGeom prst="ellipse">
@@ -7122,7 +7122,7 @@
         </p:nvSpPr>
         <p:spPr>
           <a:xfrm>
-            <a:off x="2621280" y="2048256"/>
+            <a:off x="3261360" y="2048256"/>
             <a:ext cx="1652016" cy="353568"/>
           </a:xfrm>
           <a:prstGeom prst="roundRect">
@@ -7151,7 +7151,7 @@
         </p:nvSpPr>
         <p:spPr>
           <a:xfrm>
-            <a:off x="2621280" y="2474976"/>
+            <a:off x="3261360" y="2474976"/>
             <a:ext cx="1652016" cy="353568"/>
           </a:xfrm>
           <a:prstGeom prst="roundRect">
@@ -7180,7 +7180,7 @@
         </p:nvSpPr>
         <p:spPr>
           <a:xfrm>
-            <a:off x="2621280" y="2901696"/>
+            <a:off x="3261360" y="2901696"/>
             <a:ext cx="1652016" cy="353568"/>
           </a:xfrm>
           <a:prstGeom prst="roundRect">
@@ -7209,7 +7209,7 @@
         </p:nvSpPr>
         <p:spPr>
           <a:xfrm>
-            <a:off x="2593848" y="2011680"/>
+            <a:off x="3233928" y="2011680"/>
             <a:ext cx="1706880" cy="1280160"/>
           </a:xfrm>
           <a:prstGeom prst="rect">
@@ -10958,7 +10958,7 @@
           </p:nvPr>
         </p:nvGraphicFramePr>
         <p:xfrm>
-          <a:off x="548640" y="3037840"/>
+          <a:off x="548640" y="3054350"/>
           <a:ext cx="11091672" cy="914400"/>
         </p:xfrm>
         <a:graphic>
@@ -10976,7 +10976,7 @@
                 <a:gridCol w="1232408"/>
                 <a:gridCol w="1232408"/>
               </a:tblGrid>
-              <a:tr h="528320">
+              <a:tr h="511810">
                 <a:tc>
                   <a:txBody>
                     <a:bodyPr/>
@@ -11590,7 +11590,7 @@
                   </a:tcPr>
                 </a:tc>
               </a:tr>
-              <a:tr h="528320">
+              <a:tr h="511810">
                 <a:tc>
                   <a:txBody>
                     <a:bodyPr/>
@@ -16042,7 +16042,7 @@
           </p:nvPr>
         </p:nvGraphicFramePr>
         <p:xfrm>
-          <a:off x="548640" y="3037840"/>
+          <a:off x="548640" y="3054350"/>
           <a:ext cx="11091672" cy="914400"/>
         </p:xfrm>
         <a:graphic>
@@ -16060,7 +16060,7 @@
                 <a:gridCol w="1232408"/>
                 <a:gridCol w="1232408"/>
               </a:tblGrid>
-              <a:tr h="528320">
+              <a:tr h="511810">
                 <a:tc>
                   <a:txBody>
                     <a:bodyPr/>
@@ -16674,7 +16674,7 @@
                   </a:tcPr>
                 </a:tc>
               </a:tr>
-              <a:tr h="528320">
+              <a:tr h="511810">
                 <a:tc>
                   <a:txBody>
                     <a:bodyPr/>
